--- a/docs/Plantilla presentación de residencia.pptx
+++ b/docs/Plantilla presentación de residencia.pptx
@@ -16971,14 +16971,26 @@
           </a:bodyPr>
           <a:lstStyle/>
           <a:p>
+            <a:pPr algn="l">
+              <a:lnSpc>
+                <a:spcPct val="120000"/>
+              </a:lnSpc>
+              <a:spcBef>
+                <a:spcPts val="0"/>
+              </a:spcBef>
+              <a:spcAft>
+                <a:spcPts val="600"/>
+              </a:spcAft>
+              <a:defRPr sz="1450" b="0" i="0">
+                <a:solidFill>
+                  <a:srgbClr val="1F2937"/>
+                </a:solidFill>
+                <a:latin typeface="Arial"/>
+              </a:defRPr>
+              <a:buNone/>
+            </a:pPr>
             <a:r>
-              <a:rPr sz="1450" b="1" i="0">
-                <a:solidFill>
-                  <a:srgbClr val="000000"/>
-                </a:solidFill>
-                <a:latin typeface="Arial"/>
-              </a:rPr>
-              <a:t>Para el desarrollo de la plataforma web se seleccionó un stack tecnológico desacoplado y orientado a resiliencia:</a:t>
+              <a:t>Para el desarrollo de la plataforma web se seleccionó un stack tecnológico desacoplado, moderno y de alto rendimiento:</a:t>
             </a:r>
             <a:endParaRPr b="0" i="0" sz="1400" u="none" cap="none" strike="noStrike">
               <a:solidFill>
@@ -17358,19 +17370,26 @@
           </a:bodyPr>
           <a:lstStyle/>
           <a:p>
-            <a:pPr>
+            <a:pPr algn="l">
+              <a:defRPr sz="1500" b="1" i="0">
+                <a:solidFill>
+                  <a:srgbClr val="111827"/>
+                </a:solidFill>
+                <a:latin typeface="Arial"/>
+              </a:defRPr>
+              <a:lnSpc>
+                <a:spcPct val="120000"/>
+              </a:lnSpc>
+              <a:spcBef>
+                <a:spcPts val="0"/>
+              </a:spcBef>
               <a:spcAft>
                 <a:spcPts val="600"/>
               </a:spcAft>
+              <a:buNone/>
             </a:pPr>
             <a:r>
-              <a:rPr sz="1800" b="1" i="0">
-                <a:solidFill>
-                  <a:srgbClr val="76923C"/>
-                </a:solidFill>
-                <a:latin typeface="Arial"/>
-              </a:rPr>
-              <a:t>Principales entregables y componentes técnicos implementados:</a:t>
+              <a:t>Componentes Técnicos y Entregables Desarrollados:</a:t>
             </a:r>
             <a:endParaRPr b="0" i="0" sz="1400" u="none" cap="none" strike="noStrike">
               <a:solidFill>
@@ -17383,103 +17402,26 @@
             </a:endParaRPr>
           </a:p>
           <a:p>
-            <a:pPr>
-              <a:spcAft>
-                <a:spcPts val="500"/>
-              </a:spcAft>
+            <a:pPr algn="l">
+              <a:lnSpc>
+                <a:spcPct val="130000"/>
+              </a:lnSpc>
+              <a:spcBef>
+                <a:spcPts val="0"/>
+              </a:spcBef>
+              <a:spcAft>
+                <a:spcPts val="1000"/>
+              </a:spcAft>
+              <a:defRPr sz="1400" b="0" i="0">
+                <a:solidFill>
+                  <a:srgbClr val="1F2937"/>
+                </a:solidFill>
+                <a:latin typeface="Arial"/>
+              </a:defRPr>
+              <a:buNone/>
             </a:pPr>
             <a:r>
-              <a:rPr sz="1450" b="1" i="0">
-                <a:solidFill>
-                  <a:srgbClr val="000000"/>
-                </a:solidFill>
-                <a:latin typeface="Arial"/>
-              </a:rPr>
-              <a:t>• Documentación Técnica Formal: </a:t>
-            </a:r>
-            <a:r>
-              <a:rPr sz="1450" b="0" i="0">
-                <a:solidFill>
-                  <a:srgbClr val="000000"/>
-                </a:solidFill>
-                <a:latin typeface="Arial"/>
-              </a:rPr>
-              <a:t>Memoria de residencia completa con 66 figuras estandarizadas en blanco y negro, especificación de requerimientos y diagrama de flujo global ANSI/ISO.</a:t>
-            </a:r>
-          </a:p>
-          <a:p>
-            <a:pPr>
-              <a:spcAft>
-                <a:spcPts val="500"/>
-              </a:spcAft>
-            </a:pPr>
-            <a:r>
-              <a:rPr sz="1450" b="1" i="0">
-                <a:solidFill>
-                  <a:srgbClr val="000000"/>
-                </a:solidFill>
-                <a:latin typeface="Arial"/>
-              </a:rPr>
-              <a:t>• Mapeo Cartográfico GIS Interactivo: </a:t>
-            </a:r>
-            <a:r>
-              <a:rPr sz="1450" b="0" i="0">
-                <a:solidFill>
-                  <a:srgbClr val="000000"/>
-                </a:solidFill>
-                <a:latin typeface="Arial"/>
-              </a:rPr>
-              <a:t>Prototipo funcional en React Leaflet con polilíneas de fibra, trazado de rutas, semáforo de saturación en cajas NAP y calibración satelital GPS.</a:t>
-            </a:r>
-          </a:p>
-          <a:p>
-            <a:pPr>
-              <a:spcAft>
-                <a:spcPts val="500"/>
-              </a:spcAft>
-            </a:pPr>
-            <a:r>
-              <a:rPr sz="1450" b="1" i="0">
-                <a:solidFill>
-                  <a:srgbClr val="000000"/>
-                </a:solidFill>
-                <a:latin typeface="Arial"/>
-              </a:rPr>
-              <a:t>• Matriz de Puertos y Bloqueo Concurrente: </a:t>
-            </a:r>
-            <a:r>
-              <a:rPr sz="1450" b="0" i="0">
-                <a:solidFill>
-                  <a:srgbClr val="000000"/>
-                </a:solidFill>
-                <a:latin typeface="Arial"/>
-              </a:rPr>
-              <a:t>Chasis interactivo de 16 puertos SC-APC con resolución de colisiones mediante transacciones pesimistas (SELECT ... FOR UPDATE) en PostgreSQL.</a:t>
-            </a:r>
-          </a:p>
-          <a:p>
-            <a:pPr>
-              <a:spcAft>
-                <a:spcPts val="500"/>
-              </a:spcAft>
-            </a:pPr>
-            <a:r>
-              <a:rPr sz="1450" b="1" i="0">
-                <a:solidFill>
-                  <a:srgbClr val="000000"/>
-                </a:solidFill>
-                <a:latin typeface="Arial"/>
-              </a:rPr>
-              <a:t>• Repositorio de Código y Motor Offline: </a:t>
-            </a:r>
-            <a:r>
-              <a:rPr sz="1450" b="0" i="0">
-                <a:solidFill>
-                  <a:srgbClr val="000000"/>
-                </a:solidFill>
-                <a:latin typeface="Arial"/>
-              </a:rPr>
-              <a:t>Base de código estructurada en TypeScript, modelos Sequelize y base de datos local Dexie.js (IndexedDB) para operación continua en campo.</a:t>
+              <a:t>Los principales componentes técnicos desarrollados a la fecha comprenden la documentación técnica formal de residencia integrada por 82 figuras y 26 tablas estandarizadas de ingeniería, el prototipo funcional del visor cartográfico en React Leaflet con trazado vectorial de fibra y semaforización de saturación en cajas NAP, la matriz interactiva de chasis de 16 puertos SC-APC gobernada por transacciones pesimistas en PostgreSQL para prevenir colisiones concurrentes, así como la base de código modular estructurada en TypeScript con modelos Sequelize y endpoints REST para la administración centralizada de abonados y puertos.</a:t>
             </a:r>
           </a:p>
         </p:txBody>
@@ -17796,19 +17738,26 @@
           </a:bodyPr>
           <a:lstStyle/>
           <a:p>
-            <a:pPr>
-              <a:spcAft>
-                <a:spcPts val="500"/>
-              </a:spcAft>
+            <a:pPr algn="l">
+              <a:lnSpc>
+                <a:spcPct val="135000"/>
+              </a:lnSpc>
+              <a:spcBef>
+                <a:spcPts val="0"/>
+              </a:spcBef>
+              <a:spcAft>
+                <a:spcPts val="1000"/>
+              </a:spcAft>
+              <a:defRPr sz="1500" b="0" i="0">
+                <a:solidFill>
+                  <a:srgbClr val="1F2937"/>
+                </a:solidFill>
+                <a:latin typeface="Arial"/>
+              </a:defRPr>
+              <a:buNone/>
             </a:pPr>
             <a:r>
-              <a:rPr sz="1700" b="1" i="0">
-                <a:solidFill>
-                  <a:srgbClr val="76923C"/>
-                </a:solidFill>
-                <a:latin typeface="Arial"/>
-              </a:rPr>
-              <a:t>Evaluación de avance conforme al cronograma de actividades:</a:t>
+              <a:t>Con base en el cronograma de actividades planificado, el proyecto registra actualmente un avance físico y metodológico estimado del 40%, cumpliendo satisfactoriamente en tiempo y forma con las fases de levantamiento de infraestructura, análisis formal de requerimientos, diseño arquitectónico del software y prototipado inicial del visor cartográfico y del backend transaccional, consolidando las bases técnicas para el cierre de la implementación y pruebas operativas en campo durante las semanas subsecuentes.</a:t>
             </a:r>
             <a:endParaRPr b="0" i="0" sz="1600" u="none" cap="none" strike="noStrike">
               <a:solidFill>
@@ -17819,106 +17768,6 @@
               <a:cs typeface="Arial"/>
               <a:sym typeface="Arial"/>
             </a:endParaRPr>
-          </a:p>
-          <a:p>
-            <a:pPr>
-              <a:spcAft>
-                <a:spcPts val="500"/>
-              </a:spcAft>
-            </a:pPr>
-            <a:r>
-              <a:rPr sz="1400" b="1" i="0">
-                <a:solidFill>
-                  <a:srgbClr val="000000"/>
-                </a:solidFill>
-                <a:latin typeface="Arial"/>
-              </a:rPr>
-              <a:t>• Fases Cumplidas al 100% (Etapas 1 a 6): </a:t>
-            </a:r>
-            <a:r>
-              <a:rPr sz="1400" b="0" i="0">
-                <a:solidFill>
-                  <a:srgbClr val="000000"/>
-                </a:solidFill>
-                <a:latin typeface="Arial"/>
-              </a:rPr>
-              <a:t>Se concluyeron exitosamente en tiempo y forma la inmersión técnica, levantamiento de requerimientos, diseño de arquitectura cliente-servidor, modelado DER y diseño de wireframes responsivos.</a:t>
-            </a:r>
-          </a:p>
-          <a:p>
-            <a:pPr>
-              <a:spcAft>
-                <a:spcPts val="500"/>
-              </a:spcAft>
-            </a:pPr>
-            <a:r>
-              <a:rPr sz="1400" b="1" i="0">
-                <a:solidFill>
-                  <a:srgbClr val="000000"/>
-                </a:solidFill>
-                <a:latin typeface="Arial"/>
-              </a:rPr>
-              <a:t>• Fase Actual en Desarrollo (~70% de avance): </a:t>
-            </a:r>
-            <a:r>
-              <a:rPr sz="1400" b="0" i="0">
-                <a:solidFill>
-                  <a:srgbClr val="000000"/>
-                </a:solidFill>
-                <a:latin typeface="Arial"/>
-              </a:rPr>
-              <a:t>Se encuentra en ejecución la codificación de la API REST, la configuración de transacciones pesimistas en PostgreSQL y la persistencia local en Dexie.js para cuadrillas en campo.</a:t>
-            </a:r>
-          </a:p>
-          <a:p>
-            <a:pPr>
-              <a:spcAft>
-                <a:spcPts val="500"/>
-              </a:spcAft>
-            </a:pPr>
-            <a:r>
-              <a:rPr sz="1400" b="1" i="0">
-                <a:solidFill>
-                  <a:srgbClr val="000000"/>
-                </a:solidFill>
-                <a:latin typeface="Arial"/>
-              </a:rPr>
-              <a:t>• Fases Programadas por Ejecutar: </a:t>
-            </a:r>
-            <a:r>
-              <a:rPr sz="1400" b="0" i="0">
-                <a:solidFill>
-                  <a:srgbClr val="000000"/>
-                </a:solidFill>
-                <a:latin typeface="Arial"/>
-              </a:rPr>
-              <a:t>Pruebas piloto con personal de cuadrilla en San José del Rincón, simulación de alta concurrencia y empaquetado final multicontenedor con Docker Compose.</a:t>
-            </a:r>
-          </a:p>
-          <a:p>
-            <a:pPr>
-              <a:spcAft>
-                <a:spcPts val="500"/>
-              </a:spcAft>
-            </a:pPr>
-            <a:r>
-              <a:rPr sz="1400" b="1" i="0">
-                <a:solidFill>
-                  <a:srgbClr val="000000"/>
-                </a:solidFill>
-                <a:latin typeface="Arial"/>
-              </a:rPr>
-              <a:t>• Diagnóstico Preliminar: </a:t>
-            </a:r>
-            <a:r>
-              <a:rPr sz="1400" b="0" i="0">
-                <a:solidFill>
-                  <a:srgbClr val="000000"/>
-                </a:solidFill>
-                <a:latin typeface="Arial"/>
-              </a:rPr>
-              <a:t>El proyecto cumple rigurosamente con los plazos estipulados en el anteproyecto, demostrando la viabilidad técnica y operativa de la solución para GPON TELECOM S.A. de C.V.</a:t>
-            </a:r>
           </a:p>
         </p:txBody>
       </p:sp>
@@ -18108,19 +17957,26 @@
           </a:bodyPr>
           <a:lstStyle/>
           <a:p>
-            <a:pPr>
-              <a:spcAft>
-                <a:spcPts val="500"/>
-              </a:spcAft>
+            <a:pPr algn="l">
+              <a:lnSpc>
+                <a:spcPct val="115000"/>
+              </a:lnSpc>
+              <a:defRPr sz="1150" b="0" i="0">
+                <a:solidFill>
+                  <a:srgbClr val="1F2937"/>
+                </a:solidFill>
+                <a:latin typeface="Arial"/>
+              </a:defRPr>
+              <a:spcBef>
+                <a:spcPts val="0"/>
+              </a:spcBef>
+              <a:spcAft>
+                <a:spcPts val="600"/>
+              </a:spcAft>
+              <a:buNone/>
             </a:pPr>
             <a:r>
-              <a:rPr sz="1350" b="0" i="0">
-                <a:solidFill>
-                  <a:srgbClr val="000000"/>
-                </a:solidFill>
-                <a:latin typeface="Arial"/>
-              </a:rPr>
-              <a:t>• International Telecommunication Union. (2003). Recomendación ITU-T G.984.1 / G.984.2: Redes ópticas pasivas con capacidad de gigabit (GPON). Ginebra: ITU.</a:t>
+              <a:t>International Telecommunication Union. (2003). Recomendación ITU-T G.984.1 / G.984.2: Redes ópticas pasivas con capacidad de gigabit (GPON). Ginebra: ITU.</a:t>
             </a:r>
             <a:endParaRPr b="0" i="0" sz="1400" u="none" cap="none" strike="noStrike">
               <a:solidFill>
@@ -18133,67 +17989,95 @@
             </a:endParaRPr>
           </a:p>
           <a:p>
-            <a:pPr>
-              <a:spcAft>
-                <a:spcPts val="500"/>
-              </a:spcAft>
+            <a:pPr algn="l">
+              <a:lnSpc>
+                <a:spcPct val="115000"/>
+              </a:lnSpc>
+              <a:spcBef>
+                <a:spcPts val="0"/>
+              </a:spcBef>
+              <a:spcAft>
+                <a:spcPts val="600"/>
+              </a:spcAft>
+              <a:defRPr sz="1150" b="0" i="0">
+                <a:solidFill>
+                  <a:srgbClr val="1F2937"/>
+                </a:solidFill>
+                <a:latin typeface="Arial"/>
+              </a:defRPr>
+              <a:buNone/>
             </a:pPr>
             <a:r>
-              <a:rPr sz="1350" b="0" i="0">
-                <a:solidFill>
-                  <a:srgbClr val="000000"/>
-                </a:solidFill>
-                <a:latin typeface="Arial"/>
-              </a:rPr>
-              <a:t>• Tanenbaum, A. S., &amp; Wetherall, D. J. (2014). Redes de computadoras (5.ª ed.). Ciudad de México: Pearson Educación.</a:t>
+              <a:t>Tanenbaum, A. S., &amp; Wetherall, D. J. (2014). Redes de computadoras (5.ª ed.). Ciudad de México: Pearson Educación.</a:t>
             </a:r>
           </a:p>
           <a:p>
-            <a:pPr>
-              <a:spcAft>
-                <a:spcPts val="500"/>
-              </a:spcAft>
+            <a:pPr algn="l">
+              <a:lnSpc>
+                <a:spcPct val="115000"/>
+              </a:lnSpc>
+              <a:spcBef>
+                <a:spcPts val="0"/>
+              </a:spcBef>
+              <a:spcAft>
+                <a:spcPts val="600"/>
+              </a:spcAft>
+              <a:defRPr sz="1150" b="0" i="0">
+                <a:solidFill>
+                  <a:srgbClr val="1F2937"/>
+                </a:solidFill>
+                <a:latin typeface="Arial"/>
+              </a:defRPr>
+              <a:buNone/>
             </a:pPr>
             <a:r>
-              <a:rPr sz="1350" b="0" i="0">
-                <a:solidFill>
-                  <a:srgbClr val="000000"/>
-                </a:solidFill>
-                <a:latin typeface="Arial"/>
-              </a:rPr>
-              <a:t>• Silberschatz, A., Korth, H. F., &amp; Sudarshan, S. (2019). Database System Concepts (7th ed.). Nueva York: McGraw-Hill.</a:t>
+              <a:t>Silberschatz, A., Korth, H. F., &amp; Sudarshan, S. (2019). Database System Concepts (7th ed.). Nueva York: McGraw-Hill.</a:t>
             </a:r>
           </a:p>
           <a:p>
-            <a:pPr>
-              <a:spcAft>
-                <a:spcPts val="500"/>
-              </a:spcAft>
+            <a:pPr algn="l">
+              <a:lnSpc>
+                <a:spcPct val="115000"/>
+              </a:lnSpc>
+              <a:spcBef>
+                <a:spcPts val="0"/>
+              </a:spcBef>
+              <a:spcAft>
+                <a:spcPts val="600"/>
+              </a:spcAft>
+              <a:defRPr sz="1150" b="0" i="0">
+                <a:solidFill>
+                  <a:srgbClr val="1F2937"/>
+                </a:solidFill>
+                <a:latin typeface="Arial"/>
+              </a:defRPr>
+              <a:buNone/>
             </a:pPr>
             <a:r>
-              <a:rPr sz="1350" b="0" i="0">
-                <a:solidFill>
-                  <a:srgbClr val="000000"/>
-                </a:solidFill>
-                <a:latin typeface="Arial"/>
-              </a:rPr>
-              <a:t>• World Wide Web Consortium (W3C). (2018). Web Content Accessibility Guidelines (WCAG) 2.1. W3C Recommendation. https://www.w3.org/TR/WCAG21/</a:t>
+              <a:t>World Wide Web Consortium (W3C). (2018). Web Content Accessibility Guidelines (WCAG) 2.1. W3C Recommendation. https://www.w3.org/TR/WCAG21/</a:t>
             </a:r>
           </a:p>
           <a:p>
-            <a:pPr>
-              <a:spcAft>
-                <a:spcPts val="500"/>
-              </a:spcAft>
+            <a:pPr algn="l">
+              <a:lnSpc>
+                <a:spcPct val="115000"/>
+              </a:lnSpc>
+              <a:spcBef>
+                <a:spcPts val="0"/>
+              </a:spcBef>
+              <a:spcAft>
+                <a:spcPts val="600"/>
+              </a:spcAft>
+              <a:defRPr sz="1150" b="0" i="0">
+                <a:solidFill>
+                  <a:srgbClr val="1F2937"/>
+                </a:solidFill>
+                <a:latin typeface="Arial"/>
+              </a:defRPr>
+              <a:buNone/>
             </a:pPr>
             <a:r>
-              <a:rPr sz="1350" b="0" i="0">
-                <a:solidFill>
-                  <a:srgbClr val="000000"/>
-                </a:solidFill>
-                <a:latin typeface="Arial"/>
-              </a:rPr>
-              <a:t>• PostgreSQL Global Development Group. (2024). PostgreSQL 16.0 Documentation: Explicit Locking and Transaction Isolation. https://www.postgresql.org/docs/16/</a:t>
+              <a:t>PostgreSQL Global Development Group. (2024). PostgreSQL 16.0 Documentation: Explicit Locking and Transaction Isolation. https://www.postgresql.org/docs/16/</a:t>
             </a:r>
           </a:p>
         </p:txBody>
@@ -18757,18 +18641,25 @@
           </a:bodyPr>
           <a:lstStyle/>
           <a:p>
-            <a:pPr>
-              <a:spcAft>
-                <a:spcPts val="500"/>
-              </a:spcAft>
+            <a:pPr algn="l">
+              <a:lnSpc>
+                <a:spcPct val="120000"/>
+              </a:lnSpc>
+              <a:defRPr sz="1400" b="0" i="0">
+                <a:solidFill>
+                  <a:srgbClr val="1F2937"/>
+                </a:solidFill>
+                <a:latin typeface="Arial"/>
+              </a:defRPr>
+              <a:spcBef>
+                <a:spcPts val="0"/>
+              </a:spcBef>
+              <a:spcAft>
+                <a:spcPts val="400"/>
+              </a:spcAft>
+              <a:buNone/>
             </a:pPr>
             <a:r>
-              <a:rPr sz="1600" b="1" i="0">
-                <a:solidFill>
-                  <a:srgbClr val="000000"/>
-                </a:solidFill>
-                <a:latin typeface="Arial"/>
-              </a:rPr>
               <a:t>1. Empresa (Ubicación Geográfica y Organigrama)</a:t>
             </a:r>
             <a:endParaRPr b="0" i="0" sz="1400" u="none" cap="none" strike="noStrike">
@@ -18782,146 +18673,209 @@
             </a:endParaRPr>
           </a:p>
           <a:p>
-            <a:pPr>
-              <a:spcAft>
-                <a:spcPts val="500"/>
-              </a:spcAft>
+            <a:pPr algn="l">
+              <a:lnSpc>
+                <a:spcPct val="120000"/>
+              </a:lnSpc>
+              <a:spcBef>
+                <a:spcPts val="0"/>
+              </a:spcBef>
+              <a:spcAft>
+                <a:spcPts val="400"/>
+              </a:spcAft>
+              <a:defRPr sz="1400" b="0" i="0">
+                <a:solidFill>
+                  <a:srgbClr val="1F2937"/>
+                </a:solidFill>
+                <a:latin typeface="Arial"/>
+              </a:defRPr>
+              <a:buNone/>
             </a:pPr>
             <a:r>
-              <a:rPr sz="1600" b="1" i="0">
-                <a:solidFill>
-                  <a:srgbClr val="000000"/>
-                </a:solidFill>
-                <a:latin typeface="Arial"/>
-              </a:rPr>
               <a:t>2. Introducción al Proyecto</a:t>
             </a:r>
           </a:p>
           <a:p>
-            <a:pPr>
-              <a:spcAft>
-                <a:spcPts val="500"/>
-              </a:spcAft>
+            <a:pPr algn="l">
+              <a:lnSpc>
+                <a:spcPct val="120000"/>
+              </a:lnSpc>
+              <a:spcBef>
+                <a:spcPts val="0"/>
+              </a:spcBef>
+              <a:spcAft>
+                <a:spcPts val="400"/>
+              </a:spcAft>
+              <a:defRPr sz="1400" b="0" i="0">
+                <a:solidFill>
+                  <a:srgbClr val="1F2937"/>
+                </a:solidFill>
+                <a:latin typeface="Arial"/>
+              </a:defRPr>
+              <a:buNone/>
             </a:pPr>
             <a:r>
-              <a:rPr sz="1600" b="1" i="0">
-                <a:solidFill>
-                  <a:srgbClr val="000000"/>
-                </a:solidFill>
-                <a:latin typeface="Arial"/>
-              </a:rPr>
-              <a:t>3. Planteamiento del Problema y Pregunta Generadora</a:t>
+              <a:t>3. Planteamiento del Problema y Pregunta de Investigación</a:t>
             </a:r>
           </a:p>
           <a:p>
-            <a:pPr>
-              <a:spcAft>
-                <a:spcPts val="500"/>
-              </a:spcAft>
+            <a:pPr algn="l">
+              <a:lnSpc>
+                <a:spcPct val="120000"/>
+              </a:lnSpc>
+              <a:spcBef>
+                <a:spcPts val="0"/>
+              </a:spcBef>
+              <a:spcAft>
+                <a:spcPts val="400"/>
+              </a:spcAft>
+              <a:defRPr sz="1400" b="0" i="0">
+                <a:solidFill>
+                  <a:srgbClr val="1F2937"/>
+                </a:solidFill>
+                <a:latin typeface="Arial"/>
+              </a:defRPr>
+              <a:buNone/>
             </a:pPr>
             <a:r>
-              <a:rPr sz="1600" b="1" i="0">
-                <a:solidFill>
-                  <a:srgbClr val="000000"/>
-                </a:solidFill>
-                <a:latin typeface="Arial"/>
-              </a:rPr>
               <a:t>4. Justificación Técnica y Operativa</a:t>
             </a:r>
           </a:p>
           <a:p>
-            <a:pPr>
-              <a:spcAft>
-                <a:spcPts val="500"/>
-              </a:spcAft>
+            <a:pPr algn="l">
+              <a:lnSpc>
+                <a:spcPct val="120000"/>
+              </a:lnSpc>
+              <a:spcBef>
+                <a:spcPts val="0"/>
+              </a:spcBef>
+              <a:spcAft>
+                <a:spcPts val="400"/>
+              </a:spcAft>
+              <a:defRPr sz="1400" b="0" i="0">
+                <a:solidFill>
+                  <a:srgbClr val="1F2937"/>
+                </a:solidFill>
+                <a:latin typeface="Arial"/>
+              </a:defRPr>
+              <a:buNone/>
             </a:pPr>
             <a:r>
-              <a:rPr sz="1600" b="1" i="0">
-                <a:solidFill>
-                  <a:srgbClr val="000000"/>
-                </a:solidFill>
-                <a:latin typeface="Arial"/>
-              </a:rPr>
               <a:t>5. Objetivos del Proyecto (General y Específicos)</a:t>
             </a:r>
           </a:p>
           <a:p>
-            <a:pPr>
-              <a:spcAft>
-                <a:spcPts val="500"/>
-              </a:spcAft>
+            <a:pPr algn="l">
+              <a:lnSpc>
+                <a:spcPct val="120000"/>
+              </a:lnSpc>
+              <a:spcBef>
+                <a:spcPts val="0"/>
+              </a:spcBef>
+              <a:spcAft>
+                <a:spcPts val="400"/>
+              </a:spcAft>
+              <a:defRPr sz="1400" b="0" i="0">
+                <a:solidFill>
+                  <a:srgbClr val="1F2937"/>
+                </a:solidFill>
+                <a:latin typeface="Arial"/>
+              </a:defRPr>
+              <a:buNone/>
             </a:pPr>
             <a:r>
-              <a:rPr sz="1600" b="1" i="0">
-                <a:solidFill>
-                  <a:srgbClr val="000000"/>
-                </a:solidFill>
-                <a:latin typeface="Arial"/>
-              </a:rPr>
               <a:t>6. Herramientas Tecnológicas (Stack de Software)</a:t>
             </a:r>
           </a:p>
           <a:p>
-            <a:pPr>
-              <a:spcAft>
-                <a:spcPts val="500"/>
-              </a:spcAft>
+            <a:pPr algn="l">
+              <a:lnSpc>
+                <a:spcPct val="120000"/>
+              </a:lnSpc>
+              <a:spcBef>
+                <a:spcPts val="0"/>
+              </a:spcBef>
+              <a:spcAft>
+                <a:spcPts val="400"/>
+              </a:spcAft>
+              <a:defRPr sz="1400" b="0" i="0">
+                <a:solidFill>
+                  <a:srgbClr val="1F2937"/>
+                </a:solidFill>
+                <a:latin typeface="Arial"/>
+              </a:defRPr>
+              <a:buNone/>
             </a:pPr>
             <a:r>
-              <a:rPr sz="1600" b="1" i="0">
-                <a:solidFill>
-                  <a:srgbClr val="000000"/>
-                </a:solidFill>
-                <a:latin typeface="Arial"/>
-              </a:rPr>
               <a:t>7. Evidencias de Avance Técnico</a:t>
             </a:r>
           </a:p>
           <a:p>
-            <a:pPr>
-              <a:spcAft>
-                <a:spcPts val="500"/>
-              </a:spcAft>
+            <a:pPr algn="l">
+              <a:lnSpc>
+                <a:spcPct val="120000"/>
+              </a:lnSpc>
+              <a:spcBef>
+                <a:spcPts val="0"/>
+              </a:spcBef>
+              <a:spcAft>
+                <a:spcPts val="400"/>
+              </a:spcAft>
+              <a:defRPr sz="1400" b="0" i="0">
+                <a:solidFill>
+                  <a:srgbClr val="1F2937"/>
+                </a:solidFill>
+                <a:latin typeface="Arial"/>
+              </a:defRPr>
+              <a:buNone/>
             </a:pPr>
             <a:r>
-              <a:rPr sz="1600" b="1" i="0">
-                <a:solidFill>
-                  <a:srgbClr val="000000"/>
-                </a:solidFill>
-                <a:latin typeface="Arial"/>
-              </a:rPr>
               <a:t>8. Cronograma de Actividades</a:t>
             </a:r>
           </a:p>
           <a:p>
-            <a:pPr>
-              <a:spcAft>
-                <a:spcPts val="500"/>
-              </a:spcAft>
+            <a:pPr algn="l">
+              <a:lnSpc>
+                <a:spcPct val="120000"/>
+              </a:lnSpc>
+              <a:spcBef>
+                <a:spcPts val="0"/>
+              </a:spcBef>
+              <a:spcAft>
+                <a:spcPts val="400"/>
+              </a:spcAft>
+              <a:defRPr sz="1400" b="0" i="0">
+                <a:solidFill>
+                  <a:srgbClr val="1F2937"/>
+                </a:solidFill>
+                <a:latin typeface="Arial"/>
+              </a:defRPr>
+              <a:buNone/>
             </a:pPr>
             <a:r>
-              <a:rPr sz="1600" b="1" i="0">
-                <a:solidFill>
-                  <a:srgbClr val="000000"/>
-                </a:solidFill>
-                <a:latin typeface="Arial"/>
-              </a:rPr>
               <a:t>9. Conclusiones Preliminares (Avance)</a:t>
             </a:r>
           </a:p>
           <a:p>
-            <a:pPr>
-              <a:spcAft>
-                <a:spcPts val="500"/>
-              </a:spcAft>
+            <a:pPr algn="l">
+              <a:lnSpc>
+                <a:spcPct val="120000"/>
+              </a:lnSpc>
+              <a:spcBef>
+                <a:spcPts val="0"/>
+              </a:spcBef>
+              <a:spcAft>
+                <a:spcPts val="400"/>
+              </a:spcAft>
+              <a:defRPr sz="1400" b="0" i="0">
+                <a:solidFill>
+                  <a:srgbClr val="1F2937"/>
+                </a:solidFill>
+                <a:latin typeface="Arial"/>
+              </a:defRPr>
+              <a:buNone/>
             </a:pPr>
             <a:r>
-              <a:rPr sz="1600" b="1" i="0">
-                <a:solidFill>
-                  <a:srgbClr val="000000"/>
-                </a:solidFill>
-                <a:latin typeface="Arial"/>
-              </a:rPr>
               <a:t>10. Bibliografía y Referencias</a:t>
             </a:r>
           </a:p>
@@ -19033,47 +18987,26 @@
           </a:bodyPr>
           <a:lstStyle/>
           <a:p>
-            <a:pPr>
-              <a:spcAft>
-                <a:spcPts val="400"/>
-              </a:spcAft>
+            <a:pPr algn="l">
+              <a:lnSpc>
+                <a:spcPct val="130000"/>
+              </a:lnSpc>
+              <a:defRPr sz="1500" b="0" i="0">
+                <a:solidFill>
+                  <a:srgbClr val="1F2937"/>
+                </a:solidFill>
+                <a:latin typeface="Arial"/>
+              </a:defRPr>
+              <a:spcBef>
+                <a:spcPts val="0"/>
+              </a:spcBef>
+              <a:spcAft>
+                <a:spcPts val="800"/>
+              </a:spcAft>
+              <a:buNone/>
             </a:pPr>
             <a:r>
-              <a:rPr sz="1500" b="1" i="0">
-                <a:solidFill>
-                  <a:srgbClr val="000000"/>
-                </a:solidFill>
-                <a:latin typeface="Arial"/>
-              </a:rPr>
-              <a:t>• GPON TELECOM S.A. de C.V.: </a:t>
-            </a:r>
-            <a:r>
-              <a:rPr sz="1500" b="0" i="0">
-                <a:solidFill>
-                  <a:srgbClr val="000000"/>
-                </a:solidFill>
-                <a:latin typeface="Arial"/>
-              </a:rPr>
-              <a:t>Empresa proveedora de servicios de telecomunicaciones e Internet de alta velocidad mediante fibra óptica (ISP regional).
-</a:t>
-            </a:r>
-            <a:r>
-              <a:rPr sz="1500" b="1" i="0">
-                <a:solidFill>
-                  <a:srgbClr val="000000"/>
-                </a:solidFill>
-                <a:latin typeface="Arial"/>
-              </a:rPr>
-              <a:t>• Ubicación Geográfica: </a:t>
-            </a:r>
-            <a:r>
-              <a:rPr sz="1500" b="0" i="0">
-                <a:solidFill>
-                  <a:srgbClr val="000000"/>
-                </a:solidFill>
-                <a:latin typeface="Arial"/>
-              </a:rPr>
-              <a:t>Sede operativa y nodo central (NOC) en San José del Rincón, Estado de México, abasteciendo conectividad GPON/FTTx urbana y rural.</a:t>
+              <a:t>GPON TELECOM S.A. de C.V. es una empresa proveedora de servicios de telecomunicaciones e Internet de alta velocidad mediante fibra óptica (FTTx), ubicada en San José del Rincón, Estado de México, cuya misión operativa se enfoca en brindar conectividad digital confiable a comunidades urbanas y rurales mediante infraestructura pasiva GPON de última generación.</a:t>
             </a:r>
             <a:endParaRPr/>
           </a:p>
@@ -19609,28 +19542,26 @@
           </a:bodyPr>
           <a:lstStyle/>
           <a:p>
-            <a:pPr>
-              <a:spcAft>
-                <a:spcPts val="600"/>
-              </a:spcAft>
+            <a:pPr algn="l">
+              <a:defRPr sz="1500" b="0" i="0">
+                <a:solidFill>
+                  <a:srgbClr val="1F2937"/>
+                </a:solidFill>
+                <a:latin typeface="Arial"/>
+              </a:defRPr>
+              <a:lnSpc>
+                <a:spcPct val="135000"/>
+              </a:lnSpc>
+              <a:spcBef>
+                <a:spcPts val="0"/>
+              </a:spcBef>
+              <a:spcAft>
+                <a:spcPts val="1000"/>
+              </a:spcAft>
+              <a:buNone/>
             </a:pPr>
             <a:r>
-              <a:rPr sz="1500" b="1" i="0">
-                <a:solidFill>
-                  <a:srgbClr val="000000"/>
-                </a:solidFill>
-                <a:latin typeface="Arial"/>
-              </a:rPr>
-              <a:t>• Propósito General: </a:t>
-            </a:r>
-            <a:r>
-              <a:rPr sz="1500" b="0" i="0">
-                <a:solidFill>
-                  <a:srgbClr val="000000"/>
-                </a:solidFill>
-                <a:latin typeface="Arial"/>
-              </a:rPr>
-              <a:t>Desarrollo de una plataforma web para el inventario centralizado y mapeo lógico de la red de fibra óptica GPON/FTTx en GPON TELECOM S.A. de C.V.</a:t>
+              <a:t>El presente proyecto de residencia comprende el desarrollo de una plataforma web integral para el inventario centralizado y mapeo geoespacial de la red de fibra óptica GPON/FTTx de la empresa GPON TELECOM S.A. de C.V. Su propósito fundamental es modernizar y reemplazar la gestión manual desarticulada en campo, previniendo colisiones en la asignación de puertos y saturación imprevista en cajas NAP. La solución articula una arquitectura desacoplada con visor cartográfico interactivo en React y Leaflet, un backend transaccional robusto en Node.js con Express y una base de datos relacional en PostgreSQL con control de concurrencia ACID, permitiendo al personal técnico y de soporte consultar, administrar y actualizar en tiempo real el estado físico y lógico de toda la infraestructura pasiva.</a:t>
             </a:r>
             <a:endParaRPr b="0" i="0" sz="2400" u="none" cap="none" strike="noStrike">
               <a:solidFill>
@@ -19641,81 +19572,6 @@
               <a:cs typeface="Tahoma"/>
               <a:sym typeface="Tahoma"/>
             </a:endParaRPr>
-          </a:p>
-          <a:p>
-            <a:pPr>
-              <a:spcAft>
-                <a:spcPts val="600"/>
-              </a:spcAft>
-            </a:pPr>
-            <a:r>
-              <a:rPr sz="1500" b="1" i="0">
-                <a:solidFill>
-                  <a:srgbClr val="000000"/>
-                </a:solidFill>
-                <a:latin typeface="Arial"/>
-              </a:rPr>
-              <a:t>• Problemática Atendida: </a:t>
-            </a:r>
-            <a:r>
-              <a:rPr sz="1500" b="0" i="0">
-                <a:solidFill>
-                  <a:srgbClr val="000000"/>
-                </a:solidFill>
-                <a:latin typeface="Arial"/>
-              </a:rPr>
-              <a:t>Reemplazar la gestión manual y desarticulada en campo, previniendo la colisión de puertos y la saturación imprevista en cajas NAP.</a:t>
-            </a:r>
-          </a:p>
-          <a:p>
-            <a:pPr>
-              <a:spcAft>
-                <a:spcPts val="600"/>
-              </a:spcAft>
-            </a:pPr>
-            <a:r>
-              <a:rPr sz="1500" b="1" i="0">
-                <a:solidFill>
-                  <a:srgbClr val="000000"/>
-                </a:solidFill>
-                <a:latin typeface="Arial"/>
-              </a:rPr>
-              <a:t>• Arquitectura Desacoplada: </a:t>
-            </a:r>
-            <a:r>
-              <a:rPr sz="1500" b="0" i="0">
-                <a:solidFill>
-                  <a:srgbClr val="000000"/>
-                </a:solidFill>
-                <a:latin typeface="Arial"/>
-              </a:rPr>
-              <a:t>Integración de visor cartográfico geoespacial (React 18 + Leaflet), backend seguro (Node.js + Express) y base de datos relacional (PostgreSQL 16).</a:t>
-            </a:r>
-          </a:p>
-          <a:p>
-            <a:pPr>
-              <a:spcAft>
-                <a:spcPts val="600"/>
-              </a:spcAft>
-            </a:pPr>
-            <a:r>
-              <a:rPr sz="1500" b="1" i="0">
-                <a:solidFill>
-                  <a:srgbClr val="000000"/>
-                </a:solidFill>
-                <a:latin typeface="Arial"/>
-              </a:rPr>
-              <a:t>• Resiliencia Operativa: </a:t>
-            </a:r>
-            <a:r>
-              <a:rPr sz="1500" b="0" i="0">
-                <a:solidFill>
-                  <a:srgbClr val="000000"/>
-                </a:solidFill>
-                <a:latin typeface="Arial"/>
-              </a:rPr>
-              <a:t>Modelo Offline-First (IndexedDB con Dexie.js) que faculta a los técnicos para continuar registrando operaciones en zonas sin cobertura móvil.</a:t>
-            </a:r>
           </a:p>
         </p:txBody>
       </p:sp>
@@ -19905,28 +19761,26 @@
           </a:bodyPr>
           <a:lstStyle/>
           <a:p>
-            <a:pPr>
-              <a:spcAft>
-                <a:spcPts val="400"/>
-              </a:spcAft>
+            <a:pPr algn="l">
+              <a:lnSpc>
+                <a:spcPct val="130000"/>
+              </a:lnSpc>
+              <a:defRPr sz="1450" b="0" i="0">
+                <a:solidFill>
+                  <a:srgbClr val="1F2937"/>
+                </a:solidFill>
+                <a:latin typeface="Arial"/>
+              </a:defRPr>
+              <a:spcBef>
+                <a:spcPts val="0"/>
+              </a:spcBef>
+              <a:spcAft>
+                <a:spcPts val="1200"/>
+              </a:spcAft>
+              <a:buNone/>
             </a:pPr>
             <a:r>
-              <a:rPr sz="1450" b="1" i="0">
-                <a:solidFill>
-                  <a:srgbClr val="000000"/>
-                </a:solidFill>
-                <a:latin typeface="Arial"/>
-              </a:rPr>
-              <a:t>• Carencia de Inventario Centralizado: </a:t>
-            </a:r>
-            <a:r>
-              <a:rPr sz="1450" b="0" i="0">
-                <a:solidFill>
-                  <a:srgbClr val="000000"/>
-                </a:solidFill>
-                <a:latin typeface="Arial"/>
-              </a:rPr>
-              <a:t>Falta de control físico y lógico de splitters, cajas NAP y puertos SC-APC, provocando retrasos en la atención de nuevas altas.</a:t>
+              <a:t>Actualmente, la empresa GPON TELECOM S.A. de C.V. enfrenta severas dificultades operativas derivadas de la gestión manual y desarticulada en el inventario de su red de fibra óptica pasiva. La carencia de un registro digital centralizado provoca frecuentes colisiones por asignación concurrente de puertos entre cuadrillas de campo y personal de NOC, saturación inadvertida en cajas terminales NAP y demoras críticas en la provisión de nuevos suscriptores, dificultando la supervisión técnica y la toma de decisiones sobre la infraestructura de telecomunicaciones.</a:t>
             </a:r>
             <a:endParaRPr b="0" i="0" sz="1400" u="none" cap="none" strike="noStrike">
               <a:solidFill>
@@ -19939,91 +19793,71 @@
             </a:endParaRPr>
           </a:p>
           <a:p>
-            <a:pPr>
+            <a:pPr algn="l">
+              <a:lnSpc>
+                <a:spcPct val="120000"/>
+              </a:lnSpc>
+              <a:spcBef>
+                <a:spcPts val="0"/>
+              </a:spcBef>
               <a:spcAft>
                 <a:spcPts val="400"/>
               </a:spcAft>
+              <a:defRPr sz="1450" b="1" i="0">
+                <a:solidFill>
+                  <a:srgbClr val="111827"/>
+                </a:solidFill>
+                <a:latin typeface="Arial"/>
+              </a:defRPr>
+              <a:buNone/>
             </a:pPr>
             <a:r>
-              <a:rPr sz="1450" b="1" i="0">
-                <a:solidFill>
-                  <a:srgbClr val="000000"/>
-                </a:solidFill>
-                <a:latin typeface="Arial"/>
-              </a:rPr>
-              <a:t>• Colisión por Asignación Concurrente: </a:t>
-            </a:r>
-            <a:r>
-              <a:rPr sz="1450" b="0" i="0">
-                <a:solidFill>
-                  <a:srgbClr val="000000"/>
-                </a:solidFill>
-                <a:latin typeface="Arial"/>
-              </a:rPr>
-              <a:t>La asignación simultánea y manual de puertos por diferentes técnicos genera conflictos de servicio y saturación invisible para el NOC.</a:t>
+              <a:t>Pregunta de Investigación:</a:t>
             </a:r>
           </a:p>
           <a:p>
-            <a:pPr>
-              <a:spcAft>
-                <a:spcPts val="400"/>
-              </a:spcAft>
+            <a:pPr algn="l">
+              <a:lnSpc>
+                <a:spcPct val="130000"/>
+              </a:lnSpc>
+              <a:spcBef>
+                <a:spcPts val="0"/>
+              </a:spcBef>
+              <a:spcAft>
+                <a:spcPts val="800"/>
+              </a:spcAft>
+              <a:defRPr sz="1450" b="0" i="1">
+                <a:solidFill>
+                  <a:srgbClr val="1F2937"/>
+                </a:solidFill>
+                <a:latin typeface="Arial"/>
+              </a:defRPr>
+              <a:buNone/>
             </a:pPr>
             <a:r>
-              <a:rPr sz="1450" b="1" i="0">
-                <a:solidFill>
-                  <a:srgbClr val="000000"/>
-                </a:solidFill>
-                <a:latin typeface="Arial"/>
-              </a:rPr>
-              <a:t>• Aislamiento en Campo: </a:t>
-            </a:r>
-            <a:r>
-              <a:rPr sz="1450" b="0" i="0">
-                <a:solidFill>
-                  <a:srgbClr val="000000"/>
-                </a:solidFill>
-                <a:latin typeface="Arial"/>
-              </a:rPr>
-              <a:t>Pérdida de conectividad celular en cuadrillas rurales, imposibilitando la consulta o actualización de la red en tiempo real.</a:t>
+              <a:t>¿El desarrollo e implementación de un sistema web integral de inventario y mapeo lógico permite modernizar la gestión operativa y optimizar la administración de la red de fibra óptica GPON/FTTx en la empresa GPON TELECOM S.A. de C.V.?</a:t>
             </a:r>
           </a:p>
           <a:p>
-            <a:pPr>
-              <a:spcBef>
-                <a:spcPts val="800"/>
-              </a:spcBef>
-              <a:spcAft>
-                <a:spcPts val="200"/>
-              </a:spcAft>
+            <a:pPr algn="l">
+              <a:lnSpc>
+                <a:spcPct val="120000"/>
+              </a:lnSpc>
+              <a:spcBef>
+                <a:spcPts val="0"/>
+              </a:spcBef>
+              <a:spcAft>
+                <a:spcPts val="400"/>
+              </a:spcAft>
+              <a:defRPr sz="1450" b="1" i="0">
+                <a:solidFill>
+                  <a:srgbClr val="2563EB"/>
+                </a:solidFill>
+                <a:latin typeface="Arial"/>
+              </a:defRPr>
+              <a:buNone/>
             </a:pPr>
             <a:r>
-              <a:rPr sz="1500" b="1" i="0">
-                <a:solidFill>
-                  <a:srgbClr val="76923C"/>
-                </a:solidFill>
-                <a:latin typeface="Arial"/>
-              </a:rPr>
-              <a:t>Pregunta Generadora:
-</a:t>
-            </a:r>
-            <a:r>
-              <a:rPr sz="1450" b="1" i="1">
-                <a:solidFill>
-                  <a:srgbClr val="000000"/>
-                </a:solidFill>
-                <a:latin typeface="Arial"/>
-              </a:rPr>
-              <a:t>“¿Es viable optimizar la gestión de inventario y la trazabilidad técnica de la red GPON/FTTx mediante una plataforma web georreferenciada con arquitectura Offline-First?”
-</a:t>
-            </a:r>
-            <a:r>
-              <a:rPr sz="1700" b="1" i="0">
-                <a:solidFill>
-                  <a:srgbClr val="76923C"/>
-                </a:solidFill>
-                <a:latin typeface="Arial"/>
-              </a:rPr>
               <a:t>Respuesta: Sí.</a:t>
             </a:r>
           </a:p>
@@ -20324,28 +20158,26 @@
           </a:bodyPr>
           <a:lstStyle/>
           <a:p>
-            <a:pPr>
-              <a:spcAft>
-                <a:spcPts val="600"/>
-              </a:spcAft>
+            <a:pPr algn="l">
+              <a:defRPr sz="1500" b="0" i="0">
+                <a:solidFill>
+                  <a:srgbClr val="1F2937"/>
+                </a:solidFill>
+                <a:latin typeface="Arial"/>
+              </a:defRPr>
+              <a:lnSpc>
+                <a:spcPct val="135000"/>
+              </a:lnSpc>
+              <a:spcBef>
+                <a:spcPts val="0"/>
+              </a:spcBef>
+              <a:spcAft>
+                <a:spcPts val="1000"/>
+              </a:spcAft>
+              <a:buNone/>
             </a:pPr>
             <a:r>
-              <a:rPr sz="1500" b="1" i="0">
-                <a:solidFill>
-                  <a:srgbClr val="000000"/>
-                </a:solidFill>
-                <a:latin typeface="Arial"/>
-              </a:rPr>
-              <a:t>• Eficiencia Operativa: </a:t>
-            </a:r>
-            <a:r>
-              <a:rPr sz="1500" b="0" i="0">
-                <a:solidFill>
-                  <a:srgbClr val="000000"/>
-                </a:solidFill>
-                <a:latin typeface="Arial"/>
-              </a:rPr>
-              <a:t>Automatiza la asignación y liberación de puertos SC-APC, reduciendo el tiempo de atención técnica de 45 a 15 minutos por suscriptor.</a:t>
+              <a:t>La implementación de este sistema se justifica al transformar integralmente la operatividad y rentabilidad de GPON TELECOM S.A. de C.V., automatizando la asignación y liberación de puertos SC-APC para reducir los tiempos de atención técnica de 45 a tan solo 15 minutos por suscriptor. Asimismo, faculta al centro de operaciones y cuadrillas para disponer de trazabilidad geoespacial en tiempo real con semaforización de saturación, disminuyendo en un 80% los traslados técnicos fallidos por cajas saturadas y protegiendo de forma sustentable la inversión en la infraestructura pasiva de fibra óptica.</a:t>
             </a:r>
             <a:endParaRPr b="0" i="0" sz="1400" u="none" cap="none" strike="noStrike">
               <a:solidFill>
@@ -20356,81 +20188,6 @@
               <a:cs typeface="Arial"/>
               <a:sym typeface="Arial"/>
             </a:endParaRPr>
-          </a:p>
-          <a:p>
-            <a:pPr>
-              <a:spcAft>
-                <a:spcPts val="600"/>
-              </a:spcAft>
-            </a:pPr>
-            <a:r>
-              <a:rPr sz="1500" b="1" i="0">
-                <a:solidFill>
-                  <a:srgbClr val="000000"/>
-                </a:solidFill>
-                <a:latin typeface="Arial"/>
-              </a:rPr>
-              <a:t>• Trazabilidad Geoespacial: </a:t>
-            </a:r>
-            <a:r>
-              <a:rPr sz="1500" b="0" i="0">
-                <a:solidFill>
-                  <a:srgbClr val="000000"/>
-                </a:solidFill>
-                <a:latin typeface="Arial"/>
-              </a:rPr>
-              <a:t>Faculta al personal de soporte y NOC para visualizar la red mediante cartografía satelital y semáforos de saturación en tiempo real.</a:t>
-            </a:r>
-          </a:p>
-          <a:p>
-            <a:pPr>
-              <a:spcAft>
-                <a:spcPts val="600"/>
-              </a:spcAft>
-            </a:pPr>
-            <a:r>
-              <a:rPr sz="1500" b="1" i="0">
-                <a:solidFill>
-                  <a:srgbClr val="000000"/>
-                </a:solidFill>
-                <a:latin typeface="Arial"/>
-              </a:rPr>
-              <a:t>• Resiliencia en Terreno: </a:t>
-            </a:r>
-            <a:r>
-              <a:rPr sz="1500" b="0" i="0">
-                <a:solidFill>
-                  <a:srgbClr val="000000"/>
-                </a:solidFill>
-                <a:latin typeface="Arial"/>
-              </a:rPr>
-              <a:t>El esquema Offline-First con IndexedDB garantiza continuidad operativa en zonas sin cobertura, sincronizando datos al reconectar.</a:t>
-            </a:r>
-          </a:p>
-          <a:p>
-            <a:pPr>
-              <a:spcAft>
-                <a:spcPts val="600"/>
-              </a:spcAft>
-            </a:pPr>
-            <a:r>
-              <a:rPr sz="1500" b="1" i="0">
-                <a:solidFill>
-                  <a:srgbClr val="000000"/>
-                </a:solidFill>
-                <a:latin typeface="Arial"/>
-              </a:rPr>
-              <a:t>• Reducción de Costos: </a:t>
-            </a:r>
-            <a:r>
-              <a:rPr sz="1500" b="0" i="0">
-                <a:solidFill>
-                  <a:srgbClr val="000000"/>
-                </a:solidFill>
-                <a:latin typeface="Arial"/>
-              </a:rPr>
-              <a:t>Disminuye en un 80% los traslados técnicos fallidos por saturación de cajas NAP y protege la inversión en infraestructura pasiva.</a:t>
-            </a:r>
           </a:p>
         </p:txBody>
       </p:sp>
@@ -20511,18 +20268,25 @@
           </a:bodyPr>
           <a:lstStyle/>
           <a:p>
-            <a:pPr>
-              <a:spcAft>
-                <a:spcPts val="600"/>
-              </a:spcAft>
+            <a:pPr algn="l">
+              <a:defRPr sz="1600" b="1" i="0">
+                <a:solidFill>
+                  <a:srgbClr val="111827"/>
+                </a:solidFill>
+                <a:latin typeface="Arial"/>
+              </a:defRPr>
+              <a:lnSpc>
+                <a:spcPct val="120000"/>
+              </a:lnSpc>
+              <a:spcBef>
+                <a:spcPts val="0"/>
+              </a:spcBef>
+              <a:spcAft>
+                <a:spcPts val="1000"/>
+              </a:spcAft>
+              <a:buNone/>
             </a:pPr>
             <a:r>
-              <a:rPr sz="2000" b="1" i="0">
-                <a:solidFill>
-                  <a:srgbClr val="76923C"/>
-                </a:solidFill>
-                <a:latin typeface="Arial"/>
-              </a:rPr>
               <a:t>Objetivo General:</a:t>
             </a:r>
             <a:endParaRPr b="0" i="0" sz="2400" u="none" cap="none" strike="noStrike">
@@ -20536,94 +20300,26 @@
             </a:endParaRPr>
           </a:p>
           <a:p>
-            <a:pPr>
-              <a:spcAft>
-                <a:spcPts val="1000"/>
-              </a:spcAft>
+            <a:pPr algn="l">
+              <a:lnSpc>
+                <a:spcPct val="135000"/>
+              </a:lnSpc>
+              <a:spcBef>
+                <a:spcPts val="0"/>
+              </a:spcBef>
+              <a:spcAft>
+                <a:spcPts val="1200"/>
+              </a:spcAft>
+              <a:defRPr sz="1500" b="0" i="0">
+                <a:solidFill>
+                  <a:srgbClr val="1F2937"/>
+                </a:solidFill>
+                <a:latin typeface="Arial"/>
+              </a:defRPr>
+              <a:buNone/>
             </a:pPr>
             <a:r>
-              <a:rPr sz="1550" b="0" i="0">
-                <a:solidFill>
-                  <a:srgbClr val="000000"/>
-                </a:solidFill>
-                <a:latin typeface="Arial"/>
-              </a:rPr>
-              <a:t>Desarrollar e implementar un sistema web para el inventario y mapeo lógico de la infraestructura de red GPON/FTTx de la empresa GPON TELECOM S.A. de C.V., mediante arquitectura cliente-servidor, bases de datos relacionales y visualización geoespacial, optimizando la asignación de puertos y la trazabilidad técnica en campo.</a:t>
-            </a:r>
-          </a:p>
-          <a:p>
-            <a:pPr>
-              <a:spcAft>
-                <a:spcPts val="400"/>
-              </a:spcAft>
-            </a:pPr>
-            <a:r>
-              <a:rPr sz="1450" b="1" i="0">
-                <a:solidFill>
-                  <a:srgbClr val="000000"/>
-                </a:solidFill>
-                <a:latin typeface="Arial"/>
-              </a:rPr>
-              <a:t>• Alcance de Dominio: </a:t>
-            </a:r>
-            <a:r>
-              <a:rPr sz="1450" b="0" i="0">
-                <a:solidFill>
-                  <a:srgbClr val="000000"/>
-                </a:solidFill>
-                <a:latin typeface="Arial"/>
-              </a:rPr>
-              <a:t>Control pasivo integral desde el ODF central hasta cajas NAP terminales de 16 puertos.</a:t>
-            </a:r>
-          </a:p>
-          <a:p>
-            <a:pPr>
-              <a:spcAft>
-                <a:spcPts val="400"/>
-              </a:spcAft>
-            </a:pPr>
-            <a:r>
-              <a:rPr sz="1450" b="1" i="0">
-                <a:solidFill>
-                  <a:srgbClr val="000000"/>
-                </a:solidFill>
-                <a:latin typeface="Arial"/>
-              </a:rPr>
-              <a:t>• Concurrencia Robusta: </a:t>
-            </a:r>
-            <a:r>
-              <a:rPr sz="1450" b="0" i="0">
-                <a:solidFill>
-                  <a:srgbClr val="000000"/>
-                </a:solidFill>
-                <a:latin typeface="Arial"/>
-              </a:rPr>
-              <a:t>Bloqueo pesimista de registros para garantizar consistencia transaccional ACID.</a:t>
-            </a:r>
-          </a:p>
-          <a:p>
-            <a:pPr>
-              <a:spcAft>
-                <a:spcPts val="400"/>
-              </a:spcAft>
-            </a:pPr>
-            <a:r>
-              <a:rPr sz="1450" b="1" i="0">
-                <a:solidFill>
-                  <a:srgbClr val="000000"/>
-                </a:solidFill>
-                <a:latin typeface="Arial"/>
-              </a:rPr>
-              <a:t>• Disponibilidad Móvil: </a:t>
-            </a:r>
-            <a:r>
-              <a:rPr sz="1450" b="0" i="0">
-                <a:solidFill>
-                  <a:srgbClr val="000000"/>
-                </a:solidFill>
-                <a:latin typeface="Arial"/>
-              </a:rPr>
-              <a:t>Sincronización diferida y operación continua en cuadrillas técnicas de campo.</a:t>
+              <a:t>Desarrollar una aplicación web para el inventario y mapeo lógico de redes GPON/FTTx, mediante el diseño de vistas tabulares y diagramas lógicos simples, para optimizar el control de la infraestructura por parte del equipo técnico y de soporte.</a:t>
             </a:r>
           </a:p>
         </p:txBody>
@@ -20814,18 +20510,25 @@
           </a:bodyPr>
           <a:lstStyle/>
           <a:p>
-            <a:pPr>
-              <a:spcAft>
-                <a:spcPts val="400"/>
-              </a:spcAft>
+            <a:pPr algn="l">
+              <a:defRPr sz="1600" b="1" i="0">
+                <a:solidFill>
+                  <a:srgbClr val="111827"/>
+                </a:solidFill>
+                <a:latin typeface="Arial"/>
+              </a:defRPr>
+              <a:lnSpc>
+                <a:spcPct val="120000"/>
+              </a:lnSpc>
+              <a:spcBef>
+                <a:spcPts val="0"/>
+              </a:spcBef>
+              <a:spcAft>
+                <a:spcPts val="1000"/>
+              </a:spcAft>
+              <a:buNone/>
             </a:pPr>
             <a:r>
-              <a:rPr sz="1900" b="1" i="0">
-                <a:solidFill>
-                  <a:srgbClr val="76923C"/>
-                </a:solidFill>
-                <a:latin typeface="Arial"/>
-              </a:rPr>
               <a:t>Objetivos Específicos:</a:t>
             </a:r>
             <a:endParaRPr b="0" i="0" sz="1400" u="none" cap="none" strike="noStrike">
@@ -20839,153 +20542,72 @@
             </a:endParaRPr>
           </a:p>
           <a:p>
-            <a:pPr>
-              <a:spcAft>
-                <a:spcPts val="300"/>
-              </a:spcAft>
+            <a:pPr algn="l">
+              <a:lnSpc>
+                <a:spcPct val="130000"/>
+              </a:lnSpc>
+              <a:spcBef>
+                <a:spcPts val="0"/>
+              </a:spcBef>
+              <a:spcAft>
+                <a:spcPts val="1000"/>
+              </a:spcAft>
+              <a:defRPr sz="1400" b="0" i="0">
+                <a:solidFill>
+                  <a:srgbClr val="1F2937"/>
+                </a:solidFill>
+                <a:latin typeface="Arial"/>
+              </a:defRPr>
+              <a:buNone/>
             </a:pPr>
             <a:r>
-              <a:rPr sz="1400" b="1" i="0">
-                <a:solidFill>
-                  <a:srgbClr val="000000"/>
-                </a:solidFill>
-                <a:latin typeface="Arial"/>
-              </a:rPr>
-              <a:t>1. Levantamiento e Infraestructura: </a:t>
-            </a:r>
-            <a:r>
-              <a:rPr sz="1400" b="0" i="0">
-                <a:solidFill>
-                  <a:srgbClr val="000000"/>
-                </a:solidFill>
-                <a:latin typeface="Arial"/>
-              </a:rPr>
-              <a:t>Caracterizar la red GPON pasiva (ODF, splitters PLC 1:4 y 1:16, cajas NAP y acometidas de fibra).</a:t>
+              <a:t>1. Analizar los requerimientos operativos de la red de fibra óptica mediante el levantamiento de información sobre el hardware (NAP/ODF), para diseñar la arquitectura del sistema y el modelo de la base de datos.</a:t>
             </a:r>
           </a:p>
           <a:p>
-            <a:pPr>
-              <a:spcAft>
-                <a:spcPts val="300"/>
-              </a:spcAft>
+            <a:pPr algn="l">
+              <a:lnSpc>
+                <a:spcPct val="130000"/>
+              </a:lnSpc>
+              <a:spcBef>
+                <a:spcPts val="0"/>
+              </a:spcBef>
+              <a:spcAft>
+                <a:spcPts val="1000"/>
+              </a:spcAft>
+              <a:defRPr sz="1400" b="0" i="0">
+                <a:solidFill>
+                  <a:srgbClr val="1F2937"/>
+                </a:solidFill>
+                <a:latin typeface="Arial"/>
+              </a:defRPr>
+              <a:buNone/>
             </a:pPr>
             <a:r>
-              <a:rPr sz="1400" b="1" i="0">
-                <a:solidFill>
-                  <a:srgbClr val="000000"/>
-                </a:solidFill>
-                <a:latin typeface="Arial"/>
-              </a:rPr>
-              <a:t>2. Modelado de Datos y Arquitectura: </a:t>
-            </a:r>
-            <a:r>
-              <a:rPr sz="1400" b="0" i="0">
-                <a:solidFill>
-                  <a:srgbClr val="000000"/>
-                </a:solidFill>
-                <a:latin typeface="Arial"/>
-              </a:rPr>
-              <a:t>Diseñar la base de datos relacional y los diagramas estructurales (DER notación Chen, casos de uso y secuencia UML).</a:t>
+              <a:t>2. Construir una interfaz web responsiva a través del uso de tecnologías de desarrollo frontend, para que los técnicos de campo actualicen desde su celular el estado de los puertos (libres, ocupados, dañados).</a:t>
             </a:r>
           </a:p>
           <a:p>
-            <a:pPr>
-              <a:spcAft>
-                <a:spcPts val="300"/>
-              </a:spcAft>
+            <a:pPr algn="l">
+              <a:lnSpc>
+                <a:spcPct val="130000"/>
+              </a:lnSpc>
+              <a:spcBef>
+                <a:spcPts val="0"/>
+              </a:spcBef>
+              <a:spcAft>
+                <a:spcPts val="1000"/>
+              </a:spcAft>
+              <a:defRPr sz="1400" b="0" i="0">
+                <a:solidFill>
+                  <a:srgbClr val="1F2937"/>
+                </a:solidFill>
+                <a:latin typeface="Arial"/>
+              </a:defRPr>
+              <a:buNone/>
             </a:pPr>
             <a:r>
-              <a:rPr sz="1400" b="1" i="0">
-                <a:solidFill>
-                  <a:srgbClr val="000000"/>
-                </a:solidFill>
-                <a:latin typeface="Arial"/>
-              </a:rPr>
-              <a:t>3. Cartografía Web Responsiva: </a:t>
-            </a:r>
-            <a:r>
-              <a:rPr sz="1400" b="0" i="0">
-                <a:solidFill>
-                  <a:srgbClr val="000000"/>
-                </a:solidFill>
-                <a:latin typeface="Arial"/>
-              </a:rPr>
-              <a:t>Maquetar e implementar interfaces de usuario optimizadas para móviles con mapas satelitales en React Leaflet.</a:t>
-            </a:r>
-          </a:p>
-          <a:p>
-            <a:pPr>
-              <a:spcAft>
-                <a:spcPts val="300"/>
-              </a:spcAft>
-            </a:pPr>
-            <a:r>
-              <a:rPr sz="1400" b="1" i="0">
-                <a:solidFill>
-                  <a:srgbClr val="000000"/>
-                </a:solidFill>
-                <a:latin typeface="Arial"/>
-              </a:rPr>
-              <a:t>4. Backend Transaccional: </a:t>
-            </a:r>
-            <a:r>
-              <a:rPr sz="1400" b="0" i="0">
-                <a:solidFill>
-                  <a:srgbClr val="000000"/>
-                </a:solidFill>
-                <a:latin typeface="Arial"/>
-              </a:rPr>
-              <a:t>Programar la API REST en Node.js/PostgreSQL con bloqueo pesimista (SELECT ... FOR UPDATE) y autenticación JWT.</a:t>
-            </a:r>
-          </a:p>
-          <a:p>
-            <a:pPr>
-              <a:spcAft>
-                <a:spcPts val="300"/>
-              </a:spcAft>
-            </a:pPr>
-            <a:r>
-              <a:rPr sz="1400" b="1" i="0">
-                <a:solidFill>
-                  <a:srgbClr val="000000"/>
-                </a:solidFill>
-                <a:latin typeface="Arial"/>
-              </a:rPr>
-              <a:t>5. Motor Offline-First: </a:t>
-            </a:r>
-            <a:r>
-              <a:rPr sz="1400" b="0" i="0">
-                <a:solidFill>
-                  <a:srgbClr val="000000"/>
-                </a:solidFill>
-                <a:latin typeface="Arial"/>
-              </a:rPr>
-              <a:t>Desarrollar persistencia local en Dexie.js (IndexedDB) para sincronización automática de operaciones en campo.</a:t>
-            </a:r>
-          </a:p>
-          <a:p>
-            <a:pPr>
-              <a:spcAft>
-                <a:spcPts val="300"/>
-              </a:spcAft>
-            </a:pPr>
-            <a:r>
-              <a:rPr sz="1400" b="1" i="0">
-                <a:solidFill>
-                  <a:srgbClr val="000000"/>
-                </a:solidFill>
-                <a:latin typeface="Arial"/>
-              </a:rPr>
-              <a:t>6. Validación y Reportes: </a:t>
-            </a:r>
-            <a:r>
-              <a:rPr sz="1400" b="0" i="0">
-                <a:solidFill>
-                  <a:srgbClr val="000000"/>
-                </a:solidFill>
-                <a:latin typeface="Arial"/>
-              </a:rPr>
-              <a:t>Ejecutar pruebas de consistencia concurrente, contrastes WCAG 2.1 y generación de reportes técnicos PDF.</a:t>
+              <a:t>3. Programar el backend del sistema mediante la creación de una API centralizada, para gestionar la información de los activos y vincular los puertos de red correspondientes a los datos de los clientes.</a:t>
             </a:r>
           </a:p>
         </p:txBody>
